--- a/Build My Life-CH.pptx
+++ b/Build My Life-CH.pptx
@@ -266,7 +266,7 @@
           <a:p>
             <a:fld id="{E759A0DE-F190-5444-87AC-4719D5F20D15}" type="datetimeFigureOut">
               <a:rPr lang="en-US" smtClean="0"/>
-              <a:t>6/19/26</a:t>
+              <a:t>6/20/26</a:t>
             </a:fld>
             <a:endParaRPr lang="en-US"/>
           </a:p>
@@ -464,7 +464,7 @@
           <a:p>
             <a:fld id="{E759A0DE-F190-5444-87AC-4719D5F20D15}" type="datetimeFigureOut">
               <a:rPr lang="en-US" smtClean="0"/>
-              <a:t>6/19/26</a:t>
+              <a:t>6/20/26</a:t>
             </a:fld>
             <a:endParaRPr lang="en-US"/>
           </a:p>
@@ -672,7 +672,7 @@
           <a:p>
             <a:fld id="{E759A0DE-F190-5444-87AC-4719D5F20D15}" type="datetimeFigureOut">
               <a:rPr lang="en-US" smtClean="0"/>
-              <a:t>6/19/26</a:t>
+              <a:t>6/20/26</a:t>
             </a:fld>
             <a:endParaRPr lang="en-US"/>
           </a:p>
@@ -870,7 +870,7 @@
           <a:p>
             <a:fld id="{E759A0DE-F190-5444-87AC-4719D5F20D15}" type="datetimeFigureOut">
               <a:rPr lang="en-US" smtClean="0"/>
-              <a:t>6/19/26</a:t>
+              <a:t>6/20/26</a:t>
             </a:fld>
             <a:endParaRPr lang="en-US"/>
           </a:p>
@@ -1145,7 +1145,7 @@
           <a:p>
             <a:fld id="{E759A0DE-F190-5444-87AC-4719D5F20D15}" type="datetimeFigureOut">
               <a:rPr lang="en-US" smtClean="0"/>
-              <a:t>6/19/26</a:t>
+              <a:t>6/20/26</a:t>
             </a:fld>
             <a:endParaRPr lang="en-US"/>
           </a:p>
@@ -1410,7 +1410,7 @@
           <a:p>
             <a:fld id="{E759A0DE-F190-5444-87AC-4719D5F20D15}" type="datetimeFigureOut">
               <a:rPr lang="en-US" smtClean="0"/>
-              <a:t>6/19/26</a:t>
+              <a:t>6/20/26</a:t>
             </a:fld>
             <a:endParaRPr lang="en-US"/>
           </a:p>
@@ -1822,7 +1822,7 @@
           <a:p>
             <a:fld id="{E759A0DE-F190-5444-87AC-4719D5F20D15}" type="datetimeFigureOut">
               <a:rPr lang="en-US" smtClean="0"/>
-              <a:t>6/19/26</a:t>
+              <a:t>6/20/26</a:t>
             </a:fld>
             <a:endParaRPr lang="en-US"/>
           </a:p>
@@ -1963,7 +1963,7 @@
           <a:p>
             <a:fld id="{E759A0DE-F190-5444-87AC-4719D5F20D15}" type="datetimeFigureOut">
               <a:rPr lang="en-US" smtClean="0"/>
-              <a:t>6/19/26</a:t>
+              <a:t>6/20/26</a:t>
             </a:fld>
             <a:endParaRPr lang="en-US"/>
           </a:p>
@@ -2076,7 +2076,7 @@
           <a:p>
             <a:fld id="{E759A0DE-F190-5444-87AC-4719D5F20D15}" type="datetimeFigureOut">
               <a:rPr lang="en-US" smtClean="0"/>
-              <a:t>6/19/26</a:t>
+              <a:t>6/20/26</a:t>
             </a:fld>
             <a:endParaRPr lang="en-US"/>
           </a:p>
@@ -2387,7 +2387,7 @@
           <a:p>
             <a:fld id="{E759A0DE-F190-5444-87AC-4719D5F20D15}" type="datetimeFigureOut">
               <a:rPr lang="en-US" smtClean="0"/>
-              <a:t>6/19/26</a:t>
+              <a:t>6/20/26</a:t>
             </a:fld>
             <a:endParaRPr lang="en-US"/>
           </a:p>
@@ -2675,7 +2675,7 @@
           <a:p>
             <a:fld id="{E759A0DE-F190-5444-87AC-4719D5F20D15}" type="datetimeFigureOut">
               <a:rPr lang="en-US" smtClean="0"/>
-              <a:t>6/19/26</a:t>
+              <a:t>6/20/26</a:t>
             </a:fld>
             <a:endParaRPr lang="en-US"/>
           </a:p>
@@ -2916,7 +2916,7 @@
           <a:p>
             <a:fld id="{E759A0DE-F190-5444-87AC-4719D5F20D15}" type="datetimeFigureOut">
               <a:rPr lang="en-US" smtClean="0"/>
-              <a:t>6/19/26</a:t>
+              <a:t>6/20/26</a:t>
             </a:fld>
             <a:endParaRPr lang="en-US"/>
           </a:p>
@@ -4007,7 +4007,7 @@
                 <a:latin typeface="Avenir Medium" panose="02000503020000020003" pitchFamily="2" charset="0"/>
                 <a:ea typeface="Bodoni Ornaments" pitchFamily="2" charset="0"/>
               </a:rPr>
-              <a:t>                  Em  </a:t>
+              <a:t>                  G  </a:t>
             </a:r>
           </a:p>
           <a:p>
@@ -4210,7 +4210,7 @@
                 <a:latin typeface="Avenir Medium" panose="02000503020000020003" pitchFamily="2" charset="0"/>
                 <a:ea typeface="Bodoni Ornaments" pitchFamily="2" charset="0"/>
               </a:rPr>
-              <a:t>                   Em</a:t>
+              <a:t>                   G</a:t>
             </a:r>
           </a:p>
           <a:p>
@@ -4621,15 +4621,22 @@
           <a:p>
             <a:pPr algn="l"/>
             <a:r>
-              <a:rPr lang="en-US" sz="3600" dirty="0">
+              <a:rPr lang="en-US" sz="3600">
                 <a:solidFill>
                   <a:srgbClr val="FFFF00"/>
                 </a:solidFill>
                 <a:latin typeface="Avenir Medium" panose="02000503020000020003" pitchFamily="2" charset="0"/>
                 <a:ea typeface="Bodoni Ornaments" pitchFamily="2" charset="0"/>
               </a:rPr>
-              <a:t>                   Em</a:t>
-            </a:r>
+              <a:t>                   G</a:t>
+            </a:r>
+            <a:endParaRPr lang="en-US" sz="3600" dirty="0">
+              <a:solidFill>
+                <a:srgbClr val="FFFF00"/>
+              </a:solidFill>
+              <a:latin typeface="Avenir Medium" panose="02000503020000020003" pitchFamily="2" charset="0"/>
+              <a:ea typeface="Bodoni Ornaments" pitchFamily="2" charset="0"/>
+            </a:endParaRPr>
           </a:p>
           <a:p>
             <a:pPr algn="l"/>
